--- a/assets/pptx/catalog-138.pptx
+++ b/assets/pptx/catalog-138.pptx
@@ -3285,7 +3285,7 @@
                 <a:ea typeface="Ebrima"/>
                 <a:cs typeface="Ebrima"/>
               </a:rPr>
-              <a:t>ሥርዓቱን እማር ዘንድ አስጨነቀኝ (4x)</a:t>
+              <a:t>ሥርዓቱን እማር ዘንድ አስጨነቀኝ 4x</a:t>
             </a:r>
           </a:p>
         </p:txBody>
@@ -3491,7 +3491,7 @@
                 <a:ea typeface="Ebrima"/>
                 <a:cs typeface="Ebrima"/>
               </a:rPr>
-              <a:t>የሕይወቴ ለሊት ማዳኑን የማይበት (2x)</a:t>
+              <a:t>የሕይወቴ ለሊት ማዳኑን የማይበት 2x</a:t>
             </a:r>
           </a:p>
         </p:txBody>
@@ -3697,7 +3697,7 @@
                 <a:ea typeface="Ebrima"/>
                 <a:cs typeface="Ebrima"/>
               </a:rPr>
-              <a:t>ዙሪያዬ ሲጨልምብኝ የአምላኬን ማዳን አየሁት (2x)</a:t>
+              <a:t>ዙሪያዬ ሲጨልምብኝ የአምላኬን ማዳን አየሁት 2x</a:t>
             </a:r>
           </a:p>
         </p:txBody>
@@ -3903,7 +3903,7 @@
                 <a:ea typeface="Ebrima"/>
                 <a:cs typeface="Ebrima"/>
               </a:rPr>
-              <a:t>የሕይወቴ ለሊት ማዳኑን የማይበት (2x)</a:t>
+              <a:t>የሕይወቴ ለሊት ማዳኑን የማይበት 2x</a:t>
             </a:r>
           </a:p>
         </p:txBody>
@@ -4145,7 +4145,7 @@
                 <a:ea typeface="Ebrima"/>
                 <a:cs typeface="Ebrima"/>
               </a:rPr>
-              <a:t>አስቸጋሪው ልቤን እስክረታው (2x)</a:t>
+              <a:t>አስቸጋሪው ልቤን እስክረታው 2x</a:t>
             </a:r>
           </a:p>
         </p:txBody>
